--- a/powerpoint/Session1.pptx
+++ b/powerpoint/Session1.pptx
@@ -20027,7 +20027,7 @@
                 <a:latin typeface="Calibri"/>
                 <a:ea typeface="DejaVu Sans"/>
               </a:rPr>
-              <a:t>Hilary 2026</a:t>
+              <a:t>Trinity 2026</a:t>
             </a:r>
             <a:endParaRPr lang="en-GB" sz="3200" b="0" strike="noStrike" spc="-1" dirty="0">
               <a:latin typeface="Arial"/>
@@ -30185,7 +30185,7 @@
                 <a:latin typeface="Calibri"/>
                 <a:ea typeface="DejaVu Sans"/>
               </a:rPr>
-              <a:t>Hilary 2026</a:t>
+              <a:t>Trinity 2026</a:t>
             </a:r>
             <a:endParaRPr lang="en-GB" sz="3200" b="0" strike="noStrike" spc="-1" dirty="0">
               <a:latin typeface="Arial"/>
@@ -45001,7 +45001,7 @@
                 <a:latin typeface="Calibri"/>
                 <a:hlinkClick r:id="rId2"/>
               </a:rPr>
-              <a:t>https://github.com/BeaGM84/MSD_R_course_HT2026-2-main.git</a:t>
+              <a:t>https://github.com/BeaGM84/MSD_R_course_TT2026</a:t>
             </a:r>
             <a:endParaRPr lang="en-US" sz="3600" spc="-1" dirty="0">
               <a:solidFill>
@@ -45011,7 +45011,7 @@
             </a:endParaRPr>
           </a:p>
           <a:p>
-            <a:pPr marL="572580" indent="-571500">
+            <a:pPr marL="1080">
               <a:lnSpc>
                 <a:spcPct val="100000"/>
               </a:lnSpc>
@@ -45025,8 +45025,6 @@
                 <a:srgbClr val="000000"/>
               </a:buClr>
               <a:buSzPct val="80000"/>
-              <a:buFont typeface="Arial" panose="020B0604020202020204" pitchFamily="34" charset="0"/>
-              <a:buChar char="•"/>
             </a:pPr>
             <a:r>
               <a:rPr lang="en-US" sz="3600" b="0" strike="noStrike" spc="-1" dirty="0">
